--- a/CrossSight_SIH2026_Idea_PPT.pptx
+++ b/CrossSight_SIH2026_Idea_PPT.pptx
@@ -5790,7 +5790,7 @@
                 <a:latin typeface="Arial" panose="020B0604020202020204" pitchFamily="34" charset="0"/>
                 <a:cs typeface="Arial" panose="020B0604020202020204" pitchFamily="34" charset="0"/>
               </a:rPr>
-              <a:t>[enter Team ID]</a:t>
+              <a:t>134754</a:t>
             </a:r>
           </a:p>
           <a:p>
@@ -6001,45 +6001,6 @@
       </p:sp>
       <p:sp>
         <p:nvSpPr>
-          <p:cNvPr id="7" name="Footer Placeholder 6"/>
-          <p:cNvSpPr>
-            <a:spLocks noGrp="1"/>
-          </p:cNvSpPr>
-          <p:nvPr>
-            <p:ph type="ftr" sz="quarter" idx="11"/>
-          </p:nvPr>
-        </p:nvSpPr>
-        <p:spPr>
-          <a:xfrm>
-            <a:off x="4648200" y="6356353"/>
-            <a:ext cx="3204000" cy="365125"/>
-          </a:xfrm>
-        </p:spPr>
-        <p:txBody>
-          <a:bodyPr/>
-          <a:lstStyle/>
-          <a:p>
-            <a:pPr>
-              <a:defRPr/>
-            </a:pPr>
-            <a:r>
-              <a:rPr lang="en-US">
-                <a:solidFill>
-                  <a:schemeClr val="bg1"/>
-                </a:solidFill>
-              </a:rPr>
-              <a:t>@SIH Idea submission- Template</a:t>
-            </a:r>
-            <a:endParaRPr lang="en-US" dirty="0">
-              <a:solidFill>
-                <a:schemeClr val="bg1"/>
-              </a:solidFill>
-            </a:endParaRPr>
-          </a:p>
-        </p:txBody>
-      </p:sp>
-      <p:sp>
-        <p:nvSpPr>
           <p:cNvPr id="10" name="Oval 9" descr="Your startup LOGO">
             <a:extLst>
               <a:ext uri="{FF2B5EF4-FFF2-40B4-BE49-F238E27FC236}">
@@ -6625,6 +6586,22 @@
               </a:rPr>
               <a:t>Turns isolated camera reads into one searchable, city-wide vehicle history</a:t>
             </a:r>
+            <a:br>
+              <a:rPr lang="en-US" sz="1500" dirty="0">
+                <a:solidFill>
+                  <a:srgbClr val="404040"/>
+                </a:solidFill>
+                <a:latin typeface="Arial"/>
+                <a:cs typeface="Arial"/>
+              </a:rPr>
+            </a:br>
+            <a:endParaRPr lang="en-US" sz="1500" dirty="0">
+              <a:solidFill>
+                <a:srgbClr val="404040"/>
+              </a:solidFill>
+              <a:latin typeface="Arial"/>
+              <a:cs typeface="Arial"/>
+            </a:endParaRPr>
           </a:p>
           <a:p>
             <a:pPr marL="228600" indent="-228600" algn="l">
@@ -6647,6 +6624,22 @@
               </a:rPr>
               <a:t>Auto-flags watchlist, cloned-plate, convoy, loitering, geofence and wrong-way events</a:t>
             </a:r>
+            <a:br>
+              <a:rPr lang="en-US" sz="1500" dirty="0">
+                <a:solidFill>
+                  <a:srgbClr val="404040"/>
+                </a:solidFill>
+                <a:latin typeface="Arial"/>
+                <a:cs typeface="Arial"/>
+              </a:rPr>
+            </a:br>
+            <a:endParaRPr lang="en-US" sz="1500" dirty="0">
+              <a:solidFill>
+                <a:srgbClr val="404040"/>
+              </a:solidFill>
+              <a:latin typeface="Arial"/>
+              <a:cs typeface="Arial"/>
+            </a:endParaRPr>
           </a:p>
           <a:p>
             <a:pPr marL="228600" indent="-228600" algn="l">
@@ -6668,28 +6661,6 @@
                 <a:cs typeface="Arial"/>
               </a:rPr>
               <a:t>Congestion, bottleneck and origin–destination insights for planners</a:t>
-            </a:r>
-          </a:p>
-          <a:p>
-            <a:pPr marL="228600" indent="-228600" algn="l">
-              <a:spcBef>
-                <a:spcPts val="0"/>
-              </a:spcBef>
-              <a:spcAft>
-                <a:spcPts val="800"/>
-              </a:spcAft>
-              <a:buFont typeface="Arial"/>
-              <a:buChar char="•"/>
-            </a:pPr>
-            <a:r>
-              <a:rPr lang="en-US" sz="1500" dirty="0">
-                <a:solidFill>
-                  <a:srgbClr val="404040"/>
-                </a:solidFill>
-                <a:latin typeface="Arial"/>
-                <a:cs typeface="Arial"/>
-              </a:rPr>
-              <a:t>Alert workflow: acknowledge, dispatch, close, with evidence</a:t>
             </a:r>
           </a:p>
         </p:txBody>
@@ -6872,8 +6843,44 @@
                 <a:latin typeface="Arial"/>
                 <a:cs typeface="Arial"/>
               </a:rPr>
-              <a:t>OCR fine-tuned on Indian plates: 72.7% exact match vs 35.4% for a global model</a:t>
-            </a:r>
+              <a:t>OCR fine-tuned on Indian plates: 72.7% exact match vs 35.4% for current </a:t>
+            </a:r>
+            <a:r>
+              <a:rPr lang="en-US" sz="1500" b="1" dirty="0">
+                <a:solidFill>
+                  <a:srgbClr val="404040"/>
+                </a:solidFill>
+                <a:latin typeface="Arial"/>
+                <a:cs typeface="Arial"/>
+              </a:rPr>
+              <a:t>existing</a:t>
+            </a:r>
+            <a:r>
+              <a:rPr lang="en-US" sz="1500" dirty="0">
+                <a:solidFill>
+                  <a:srgbClr val="404040"/>
+                </a:solidFill>
+                <a:latin typeface="Arial"/>
+                <a:cs typeface="Arial"/>
+              </a:rPr>
+              <a:t> model</a:t>
+            </a:r>
+            <a:br>
+              <a:rPr lang="en-US" sz="1500" dirty="0">
+                <a:solidFill>
+                  <a:srgbClr val="404040"/>
+                </a:solidFill>
+                <a:latin typeface="Arial"/>
+                <a:cs typeface="Arial"/>
+              </a:rPr>
+            </a:br>
+            <a:endParaRPr lang="en-US" sz="1500" dirty="0">
+              <a:solidFill>
+                <a:srgbClr val="404040"/>
+              </a:solidFill>
+              <a:latin typeface="Arial"/>
+              <a:cs typeface="Arial"/>
+            </a:endParaRPr>
           </a:p>
           <a:p>
             <a:pPr marL="228600" indent="-228600" algn="l">
@@ -6894,8 +6901,34 @@
                 <a:latin typeface="Arial"/>
                 <a:cs typeface="Arial"/>
               </a:rPr>
-              <a:t>Indian plate-format decoding picks the most probable valid plate</a:t>
-            </a:r>
+              <a:t>Improved characters identification to </a:t>
+            </a:r>
+            <a:r>
+              <a:rPr lang="en-US" sz="1500" b="1" dirty="0">
+                <a:solidFill>
+                  <a:srgbClr val="404040"/>
+                </a:solidFill>
+                <a:latin typeface="Arial"/>
+                <a:cs typeface="Arial"/>
+              </a:rPr>
+              <a:t>92.6%</a:t>
+            </a:r>
+            <a:br>
+              <a:rPr lang="en-US" sz="1500" b="1" dirty="0">
+                <a:solidFill>
+                  <a:srgbClr val="404040"/>
+                </a:solidFill>
+                <a:latin typeface="Arial"/>
+                <a:cs typeface="Arial"/>
+              </a:rPr>
+            </a:br>
+            <a:endParaRPr lang="en-US" sz="1500" b="1" dirty="0">
+              <a:solidFill>
+                <a:srgbClr val="404040"/>
+              </a:solidFill>
+              <a:latin typeface="Arial"/>
+              <a:cs typeface="Arial"/>
+            </a:endParaRPr>
           </a:p>
           <a:p>
             <a:pPr marL="228600" indent="-228600" algn="l">
@@ -6916,8 +6949,24 @@
                 <a:latin typeface="Arial"/>
                 <a:cs typeface="Arial"/>
               </a:rPr>
-              <a:t>Privacy by design: role-based access, case IDs, audit log, k-anonymity</a:t>
-            </a:r>
+              <a:t>Indian plate-format decoding picks the most probable valid plate</a:t>
+            </a:r>
+            <a:br>
+              <a:rPr lang="en-US" sz="1500" dirty="0">
+                <a:solidFill>
+                  <a:srgbClr val="404040"/>
+                </a:solidFill>
+                <a:latin typeface="Arial"/>
+                <a:cs typeface="Arial"/>
+              </a:rPr>
+            </a:br>
+            <a:endParaRPr lang="en-US" sz="1500" dirty="0">
+              <a:solidFill>
+                <a:srgbClr val="404040"/>
+              </a:solidFill>
+              <a:latin typeface="Arial"/>
+              <a:cs typeface="Arial"/>
+            </a:endParaRPr>
           </a:p>
           <a:p>
             <a:pPr marL="228600" indent="-228600" algn="l">
@@ -6938,7 +6987,7 @@
                 <a:latin typeface="Arial"/>
                 <a:cs typeface="Arial"/>
               </a:rPr>
-              <a:t>Edge-ready open-source stack on ONNX Runtime</a:t>
+              <a:t>Privacy by design: role-based access, case IDs, audit log</a:t>
             </a:r>
           </a:p>
         </p:txBody>
@@ -7084,45 +7133,6 @@
               <a:t>3</a:t>
             </a:fld>
             <a:endParaRPr lang="en-US" b="1" dirty="0">
-              <a:solidFill>
-                <a:schemeClr val="bg1"/>
-              </a:solidFill>
-            </a:endParaRPr>
-          </a:p>
-        </p:txBody>
-      </p:sp>
-      <p:sp>
-        <p:nvSpPr>
-          <p:cNvPr id="7" name="Footer Placeholder 6"/>
-          <p:cNvSpPr>
-            <a:spLocks noGrp="1"/>
-          </p:cNvSpPr>
-          <p:nvPr>
-            <p:ph type="ftr" sz="quarter" idx="11"/>
-          </p:nvPr>
-        </p:nvSpPr>
-        <p:spPr>
-          <a:xfrm>
-            <a:off x="4648200" y="6356353"/>
-            <a:ext cx="3204000" cy="365125"/>
-          </a:xfrm>
-        </p:spPr>
-        <p:txBody>
-          <a:bodyPr/>
-          <a:lstStyle/>
-          <a:p>
-            <a:pPr>
-              <a:defRPr/>
-            </a:pPr>
-            <a:r>
-              <a:rPr lang="en-US">
-                <a:solidFill>
-                  <a:schemeClr val="bg1"/>
-                </a:solidFill>
-              </a:rPr>
-              <a:t>@SIH Idea submission- Template</a:t>
-            </a:r>
-            <a:endParaRPr lang="en-US" dirty="0">
               <a:solidFill>
                 <a:schemeClr val="bg1"/>
               </a:solidFill>
@@ -7377,7 +7387,86 @@
                 <a:latin typeface="Arial"/>
                 <a:cs typeface="Arial"/>
               </a:rPr>
-              <a:t>YOLOv9 plate detector, crop, CCT OCR (india-v1), Indian format decoding</a:t>
+              <a:t>-YOLOv9 plate detector -Crop</a:t>
+            </a:r>
+          </a:p>
+          <a:p>
+            <a:pPr marL="0" indent="0" algn="l">
+              <a:spcBef>
+                <a:spcPts val="0"/>
+              </a:spcBef>
+              <a:spcAft>
+                <a:spcPts val="0"/>
+              </a:spcAft>
+              <a:buNone/>
+            </a:pPr>
+            <a:r>
+              <a:rPr lang="en-US" sz="1200" dirty="0">
+                <a:solidFill>
+                  <a:srgbClr val="404040"/>
+                </a:solidFill>
+                <a:latin typeface="Arial"/>
+                <a:cs typeface="Arial"/>
+              </a:rPr>
+              <a:t>-CCT OCR (india-v1),</a:t>
+            </a:r>
+          </a:p>
+          <a:p>
+            <a:pPr marL="0" indent="0" algn="l">
+              <a:spcBef>
+                <a:spcPts val="0"/>
+              </a:spcBef>
+              <a:spcAft>
+                <a:spcPts val="0"/>
+              </a:spcAft>
+              <a:buNone/>
+            </a:pPr>
+            <a:endParaRPr lang="en-US" sz="1200" dirty="0">
+              <a:solidFill>
+                <a:srgbClr val="404040"/>
+              </a:solidFill>
+              <a:latin typeface="Arial"/>
+              <a:cs typeface="Arial"/>
+            </a:endParaRPr>
+          </a:p>
+          <a:p>
+            <a:pPr marL="0" indent="0" algn="l">
+              <a:spcBef>
+                <a:spcPts val="0"/>
+              </a:spcBef>
+              <a:spcAft>
+                <a:spcPts val="0"/>
+              </a:spcAft>
+              <a:buNone/>
+            </a:pPr>
+            <a:r>
+              <a:rPr lang="en-US" sz="1200" b="1" dirty="0">
+                <a:solidFill>
+                  <a:srgbClr val="404040"/>
+                </a:solidFill>
+                <a:latin typeface="Arial"/>
+                <a:cs typeface="Arial"/>
+              </a:rPr>
+              <a:t>Indian format biasing</a:t>
+            </a:r>
+            <a:br>
+              <a:rPr lang="en-US" sz="1200" b="1" dirty="0">
+                <a:solidFill>
+                  <a:srgbClr val="404040"/>
+                </a:solidFill>
+                <a:latin typeface="Arial"/>
+                <a:cs typeface="Arial"/>
+              </a:rPr>
+            </a:br>
+            <a:r>
+              <a:rPr lang="en-US" sz="1200" b="1" dirty="0">
+                <a:solidFill>
+                  <a:srgbClr val="404040"/>
+                </a:solidFill>
+                <a:latin typeface="Arial"/>
+                <a:cs typeface="Arial"/>
+              </a:rPr>
+              <a:t>eg. BR&gt;BZ</a:t>
             </a:r>
           </a:p>
         </p:txBody>
@@ -8620,77 +8709,6 @@
           </a:p>
         </p:txBody>
       </p:sp>
-      <p:sp>
-        <p:nvSpPr>
-          <p:cNvPr id="7" name="Footer Placeholder 6"/>
-          <p:cNvSpPr>
-            <a:spLocks noGrp="1"/>
-          </p:cNvSpPr>
-          <p:nvPr>
-            <p:ph type="ftr" sz="quarter" idx="11"/>
-          </p:nvPr>
-        </p:nvSpPr>
-        <p:spPr>
-          <a:xfrm>
-            <a:off x="4648200" y="6356353"/>
-            <a:ext cx="3204000" cy="365125"/>
-          </a:xfrm>
-        </p:spPr>
-        <p:txBody>
-          <a:bodyPr/>
-          <a:lstStyle/>
-          <a:p>
-            <a:pPr marL="0" marR="0" lvl="0" indent="0" algn="ctr" defTabSz="457200" rtl="0" eaLnBrk="1" fontAlgn="auto" latinLnBrk="0" hangingPunct="1">
-              <a:lnSpc>
-                <a:spcPct val="100000"/>
-              </a:lnSpc>
-              <a:spcBef>
-                <a:spcPts val="0"/>
-              </a:spcBef>
-              <a:spcAft>
-                <a:spcPts val="0"/>
-              </a:spcAft>
-              <a:buClrTx/>
-              <a:buSzTx/>
-              <a:buFontTx/>
-              <a:buNone/>
-              <a:tabLst/>
-              <a:defRPr/>
-            </a:pPr>
-            <a:r>
-              <a:rPr kumimoji="0" lang="en-US" sz="1200" b="0" i="0" u="none" strike="noStrike" kern="1200" cap="none" spc="0" normalizeH="0" baseline="0" noProof="0">
-                <a:ln>
-                  <a:noFill/>
-                </a:ln>
-                <a:solidFill>
-                  <a:prstClr val="white"/>
-                </a:solidFill>
-                <a:effectLst/>
-                <a:uLnTx/>
-                <a:uFillTx/>
-                <a:latin typeface="TradeGothic"/>
-                <a:ea typeface="+mn-ea"/>
-                <a:cs typeface="+mn-cs"/>
-              </a:rPr>
-              <a:t>@SIH Idea submission- Template</a:t>
-            </a:r>
-            <a:endParaRPr kumimoji="0" lang="en-US" sz="1200" b="0" i="0" u="none" strike="noStrike" kern="1200" cap="none" spc="0" normalizeH="0" baseline="0" noProof="0" dirty="0">
-              <a:ln>
-                <a:noFill/>
-              </a:ln>
-              <a:solidFill>
-                <a:prstClr val="white"/>
-              </a:solidFill>
-              <a:effectLst/>
-              <a:uLnTx/>
-              <a:uFillTx/>
-              <a:latin typeface="TradeGothic"/>
-              <a:ea typeface="+mn-ea"/>
-              <a:cs typeface="+mn-cs"/>
-            </a:endParaRPr>
-          </a:p>
-        </p:txBody>
-      </p:sp>
       <p:pic>
         <p:nvPicPr>
           <p:cNvPr id="11" name="Picture 10"/>
@@ -8809,7 +8827,7 @@
             <a:r>
               <a:rPr lang="en-US" sz="2800" b="1" dirty="0">
                 <a:solidFill>
-                  <a:srgbClr val="D9730D"/>
+                  <a:srgbClr val="FF0000"/>
                 </a:solidFill>
                 <a:latin typeface="Arial"/>
                 <a:cs typeface="Arial"/>
@@ -8881,7 +8899,7 @@
             <a:r>
               <a:rPr lang="en-US" sz="2800" b="1" dirty="0">
                 <a:solidFill>
-                  <a:srgbClr val="D9730D"/>
+                  <a:srgbClr val="00B050"/>
                 </a:solidFill>
                 <a:latin typeface="Arial"/>
                 <a:cs typeface="Arial"/>
@@ -8958,7 +8976,7 @@
                 <a:latin typeface="Arial"/>
                 <a:cs typeface="Arial"/>
               </a:rPr>
-              <a:t>8.5 ms</a:t>
+              <a:t>&lt; 5 ms</a:t>
             </a:r>
           </a:p>
           <a:p>
@@ -9030,7 +9048,7 @@
                 <a:latin typeface="Arial"/>
                 <a:cs typeface="Arial"/>
               </a:rPr>
-              <a:t>~355 ms</a:t>
+              <a:t>~50 ms</a:t>
             </a:r>
           </a:p>
           <a:p>
@@ -9099,8 +9117,33 @@
                 <a:latin typeface="Arial"/>
                 <a:cs typeface="Arial"/>
               </a:rPr>
-              <a:t>India-tuned OCR: 35.4% with the global model, 72.7% after fine-tuning</a:t>
-            </a:r>
+              <a:t>India-tuned OCR: 35.4% with the existing model, 72.7% after fine-tuning</a:t>
+            </a:r>
+            <a:br>
+              <a:rPr lang="en-US" sz="1300" dirty="0">
+                <a:solidFill>
+                  <a:srgbClr val="404040"/>
+                </a:solidFill>
+                <a:latin typeface="Arial"/>
+                <a:cs typeface="Arial"/>
+              </a:rPr>
+            </a:br>
+            <a:br>
+              <a:rPr lang="en-US" sz="1300" dirty="0">
+                <a:solidFill>
+                  <a:srgbClr val="404040"/>
+                </a:solidFill>
+                <a:latin typeface="Arial"/>
+                <a:cs typeface="Arial"/>
+              </a:rPr>
+            </a:br>
+            <a:endParaRPr lang="en-US" sz="1300" dirty="0">
+              <a:solidFill>
+                <a:srgbClr val="404040"/>
+              </a:solidFill>
+              <a:latin typeface="Arial"/>
+              <a:cs typeface="Arial"/>
+            </a:endParaRPr>
           </a:p>
           <a:p>
             <a:pPr marL="228600" indent="-228600" algn="l">
@@ -9122,28 +9165,6 @@
                 <a:cs typeface="Arial"/>
               </a:rPr>
               <a:t>Runs on GPU or CPU; GPU self-test falls back to CPU</a:t>
-            </a:r>
-          </a:p>
-          <a:p>
-            <a:pPr marL="228600" indent="-228600" algn="l">
-              <a:spcBef>
-                <a:spcPts val="0"/>
-              </a:spcBef>
-              <a:spcAft>
-                <a:spcPts val="0"/>
-              </a:spcAft>
-              <a:buFont typeface="Arial"/>
-              <a:buChar char="•"/>
-            </a:pPr>
-            <a:r>
-              <a:rPr lang="en-US" sz="1300" dirty="0">
-                <a:solidFill>
-                  <a:srgbClr val="404040"/>
-                </a:solidFill>
-                <a:latin typeface="Arial"/>
-                <a:cs typeface="Arial"/>
-              </a:rPr>
-              <a:t>Ingest, alerts, API and dashboard work end to end on simulated data</a:t>
             </a:r>
           </a:p>
         </p:txBody>
@@ -9840,6 +9861,53 @@
           </a:p>
         </p:txBody>
       </p:sp>
+      <p:sp>
+        <p:nvSpPr>
+          <p:cNvPr id="3" name="Right Arrow 2">
+            <a:extLst>
+              <a:ext uri="{FF2B5EF4-FFF2-40B4-BE49-F238E27FC236}">
+                <a16:creationId xmlns:a16="http://schemas.microsoft.com/office/drawing/2014/main" id="{07BF63B0-691C-00D3-E809-8D1097ED1EA4}"/>
+              </a:ext>
+            </a:extLst>
+          </p:cNvPr>
+          <p:cNvSpPr/>
+          <p:nvPr/>
+        </p:nvSpPr>
+        <p:spPr>
+          <a:xfrm>
+            <a:off x="2058127" y="2022412"/>
+            <a:ext cx="748146" cy="505176"/>
+          </a:xfrm>
+          <a:prstGeom prst="rightArrow">
+            <a:avLst>
+              <a:gd name="adj1" fmla="val 50000"/>
+              <a:gd name="adj2" fmla="val 48611"/>
+            </a:avLst>
+          </a:prstGeom>
+        </p:spPr>
+        <p:style>
+          <a:lnRef idx="1">
+            <a:schemeClr val="accent1"/>
+          </a:lnRef>
+          <a:fillRef idx="3">
+            <a:schemeClr val="accent1"/>
+          </a:fillRef>
+          <a:effectRef idx="2">
+            <a:schemeClr val="accent1"/>
+          </a:effectRef>
+          <a:fontRef idx="minor">
+            <a:schemeClr val="lt1"/>
+          </a:fontRef>
+        </p:style>
+        <p:txBody>
+          <a:bodyPr rtlCol="0" anchor="ctr"/>
+          <a:lstStyle/>
+          <a:p>
+            <a:pPr algn="ctr"/>
+            <a:endParaRPr lang="en-US" dirty="0"/>
+          </a:p>
+        </p:txBody>
+      </p:sp>
     </p:spTree>
     <p:extLst>
       <p:ext uri="{BB962C8B-B14F-4D97-AF65-F5344CB8AC3E}">
@@ -10059,77 +10127,6 @@
           </a:p>
         </p:txBody>
       </p:sp>
-      <p:sp>
-        <p:nvSpPr>
-          <p:cNvPr id="7" name="Footer Placeholder 6"/>
-          <p:cNvSpPr>
-            <a:spLocks noGrp="1"/>
-          </p:cNvSpPr>
-          <p:nvPr>
-            <p:ph type="ftr" sz="quarter" idx="11"/>
-          </p:nvPr>
-        </p:nvSpPr>
-        <p:spPr>
-          <a:xfrm>
-            <a:off x="4648200" y="6356353"/>
-            <a:ext cx="3204000" cy="365125"/>
-          </a:xfrm>
-        </p:spPr>
-        <p:txBody>
-          <a:bodyPr/>
-          <a:lstStyle/>
-          <a:p>
-            <a:pPr marL="0" marR="0" lvl="0" indent="0" algn="ctr" defTabSz="457200" rtl="0" eaLnBrk="1" fontAlgn="auto" latinLnBrk="0" hangingPunct="1">
-              <a:lnSpc>
-                <a:spcPct val="100000"/>
-              </a:lnSpc>
-              <a:spcBef>
-                <a:spcPts val="0"/>
-              </a:spcBef>
-              <a:spcAft>
-                <a:spcPts val="0"/>
-              </a:spcAft>
-              <a:buClrTx/>
-              <a:buSzTx/>
-              <a:buFontTx/>
-              <a:buNone/>
-              <a:tabLst/>
-              <a:defRPr/>
-            </a:pPr>
-            <a:r>
-              <a:rPr kumimoji="0" lang="en-US" sz="1200" b="0" i="0" u="none" strike="noStrike" kern="1200" cap="none" spc="0" normalizeH="0" baseline="0" noProof="0">
-                <a:ln>
-                  <a:noFill/>
-                </a:ln>
-                <a:solidFill>
-                  <a:prstClr val="white"/>
-                </a:solidFill>
-                <a:effectLst/>
-                <a:uLnTx/>
-                <a:uFillTx/>
-                <a:latin typeface="TradeGothic"/>
-                <a:ea typeface="+mn-ea"/>
-                <a:cs typeface="+mn-cs"/>
-              </a:rPr>
-              <a:t>@SIH Idea submission- Template</a:t>
-            </a:r>
-            <a:endParaRPr kumimoji="0" lang="en-US" sz="1200" b="0" i="0" u="none" strike="noStrike" kern="1200" cap="none" spc="0" normalizeH="0" baseline="0" noProof="0" dirty="0">
-              <a:ln>
-                <a:noFill/>
-              </a:ln>
-              <a:solidFill>
-                <a:prstClr val="white"/>
-              </a:solidFill>
-              <a:effectLst/>
-              <a:uLnTx/>
-              <a:uFillTx/>
-              <a:latin typeface="TradeGothic"/>
-              <a:ea typeface="+mn-ea"/>
-              <a:cs typeface="+mn-cs"/>
-            </a:endParaRPr>
-          </a:p>
-        </p:txBody>
-      </p:sp>
       <p:pic>
         <p:nvPicPr>
           <p:cNvPr id="11" name="Picture 10"/>
@@ -10835,25 +10832,31 @@
           </a:bodyPr>
           <a:lstStyle/>
           <a:p>
-            <a:pPr marL="0" indent="0" algn="l">
+            <a:pPr>
               <a:spcBef>
                 <a:spcPts val="0"/>
               </a:spcBef>
               <a:spcAft>
-                <a:spcPts val="300"/>
+                <a:spcPts val="0"/>
               </a:spcAft>
-              <a:buNone/>
             </a:pPr>
             <a:r>
-              <a:rPr lang="en-US" sz="1500" b="1" dirty="0">
+              <a:rPr lang="en-US" sz="1400" b="1" dirty="0">
                 <a:solidFill>
                   <a:srgbClr val="1F3864"/>
                 </a:solidFill>
                 <a:latin typeface="Arial"/>
                 <a:cs typeface="Arial"/>
               </a:rPr>
-              <a:t>Social</a:t>
-            </a:r>
+              <a:t>Crime Management</a:t>
+            </a:r>
+            <a:endParaRPr lang="en-US" sz="1300" dirty="0">
+              <a:solidFill>
+                <a:srgbClr val="404040"/>
+              </a:solidFill>
+              <a:latin typeface="Arial"/>
+              <a:cs typeface="Arial"/>
+            </a:endParaRPr>
           </a:p>
           <a:p>
             <a:pPr marL="0" indent="0" algn="l">
@@ -11164,7 +11167,7 @@
                 <a:latin typeface="Arial"/>
                 <a:cs typeface="Arial"/>
               </a:rPr>
-              <a:t>Environmental</a:t>
+              <a:t>Traffic</a:t>
             </a:r>
           </a:p>
           <a:p>
@@ -11480,77 +11483,6 @@
           </a:p>
         </p:txBody>
       </p:sp>
-      <p:sp>
-        <p:nvSpPr>
-          <p:cNvPr id="7" name="Footer Placeholder 6"/>
-          <p:cNvSpPr>
-            <a:spLocks noGrp="1"/>
-          </p:cNvSpPr>
-          <p:nvPr>
-            <p:ph type="ftr" sz="quarter" idx="11"/>
-          </p:nvPr>
-        </p:nvSpPr>
-        <p:spPr>
-          <a:xfrm>
-            <a:off x="4648200" y="6356353"/>
-            <a:ext cx="3204000" cy="365125"/>
-          </a:xfrm>
-        </p:spPr>
-        <p:txBody>
-          <a:bodyPr/>
-          <a:lstStyle/>
-          <a:p>
-            <a:pPr marL="0" marR="0" lvl="0" indent="0" algn="ctr" defTabSz="457200" rtl="0" eaLnBrk="1" fontAlgn="auto" latinLnBrk="0" hangingPunct="1">
-              <a:lnSpc>
-                <a:spcPct val="100000"/>
-              </a:lnSpc>
-              <a:spcBef>
-                <a:spcPts val="0"/>
-              </a:spcBef>
-              <a:spcAft>
-                <a:spcPts val="0"/>
-              </a:spcAft>
-              <a:buClrTx/>
-              <a:buSzTx/>
-              <a:buFontTx/>
-              <a:buNone/>
-              <a:tabLst/>
-              <a:defRPr/>
-            </a:pPr>
-            <a:r>
-              <a:rPr kumimoji="0" lang="en-US" sz="1200" b="0" i="0" u="none" strike="noStrike" kern="1200" cap="none" spc="0" normalizeH="0" baseline="0" noProof="0">
-                <a:ln>
-                  <a:noFill/>
-                </a:ln>
-                <a:solidFill>
-                  <a:prstClr val="white"/>
-                </a:solidFill>
-                <a:effectLst/>
-                <a:uLnTx/>
-                <a:uFillTx/>
-                <a:latin typeface="TradeGothic"/>
-                <a:ea typeface="+mn-ea"/>
-                <a:cs typeface="+mn-cs"/>
-              </a:rPr>
-              <a:t>@SIH Idea submission- Template</a:t>
-            </a:r>
-            <a:endParaRPr kumimoji="0" lang="en-US" sz="1200" b="0" i="0" u="none" strike="noStrike" kern="1200" cap="none" spc="0" normalizeH="0" baseline="0" noProof="0" dirty="0">
-              <a:ln>
-                <a:noFill/>
-              </a:ln>
-              <a:solidFill>
-                <a:prstClr val="white"/>
-              </a:solidFill>
-              <a:effectLst/>
-              <a:uLnTx/>
-              <a:uFillTx/>
-              <a:latin typeface="TradeGothic"/>
-              <a:ea typeface="+mn-ea"/>
-              <a:cs typeface="+mn-cs"/>
-            </a:endParaRPr>
-          </a:p>
-        </p:txBody>
-      </p:sp>
       <p:pic>
         <p:nvPicPr>
           <p:cNvPr id="12" name="Picture 11"/>
@@ -11583,108 +11515,14 @@
       </p:pic>
       <p:sp>
         <p:nvSpPr>
-          <p:cNvPr id="101" name="Heading 101"/>
-          <p:cNvSpPr txBox="1"/>
-          <p:nvPr/>
-        </p:nvSpPr>
-        <p:spPr>
-          <a:xfrm>
-            <a:off x="457200" y="1180000"/>
-            <a:ext cx="5500000" cy="420000"/>
-          </a:xfrm>
-          <a:prstGeom prst="rect">
-            <a:avLst/>
-          </a:prstGeom>
-          <a:noFill/>
-          <a:ln>
-            <a:noFill/>
-          </a:ln>
-        </p:spPr>
-        <p:txBody>
-          <a:bodyPr wrap="square" lIns="0" tIns="0" rIns="0" bIns="0" rtlCol="0" anchor="ctr">
-            <a:noAutofit/>
-          </a:bodyPr>
-          <a:lstStyle/>
-          <a:p>
-            <a:pPr marL="0" indent="0" algn="l">
-              <a:spcBef>
-                <a:spcPts val="0"/>
-              </a:spcBef>
-              <a:spcAft>
-                <a:spcPts val="0"/>
-              </a:spcAft>
-              <a:buNone/>
-            </a:pPr>
-            <a:r>
-              <a:rPr lang="en-US" sz="2000" b="1" dirty="0">
-                <a:solidFill>
-                  <a:schemeClr val="tx2"/>
-                </a:solidFill>
-                <a:latin typeface="Arial"/>
-                <a:cs typeface="Arial"/>
-              </a:rPr>
-              <a:t>Research and evaluation approach</a:t>
-            </a:r>
-          </a:p>
-        </p:txBody>
-      </p:sp>
-      <p:sp>
-        <p:nvSpPr>
-          <p:cNvPr id="102" name="Heading 102"/>
-          <p:cNvSpPr txBox="1"/>
-          <p:nvPr/>
-        </p:nvSpPr>
-        <p:spPr>
-          <a:xfrm>
-            <a:off x="6257200" y="1180000"/>
-            <a:ext cx="5477600" cy="420000"/>
-          </a:xfrm>
-          <a:prstGeom prst="rect">
-            <a:avLst/>
-          </a:prstGeom>
-          <a:noFill/>
-          <a:ln>
-            <a:noFill/>
-          </a:ln>
-        </p:spPr>
-        <p:txBody>
-          <a:bodyPr wrap="square" lIns="0" tIns="0" rIns="0" bIns="0" rtlCol="0" anchor="ctr">
-            <a:noAutofit/>
-          </a:bodyPr>
-          <a:lstStyle/>
-          <a:p>
-            <a:pPr marL="0" indent="0" algn="l">
-              <a:spcBef>
-                <a:spcPts val="0"/>
-              </a:spcBef>
-              <a:spcAft>
-                <a:spcPts val="0"/>
-              </a:spcAft>
-              <a:buNone/>
-            </a:pPr>
-            <a:r>
-              <a:rPr lang="en-US" sz="2000" b="1" dirty="0">
-                <a:solidFill>
-                  <a:schemeClr val="tx2"/>
-                </a:solidFill>
-                <a:latin typeface="Arial"/>
-                <a:cs typeface="Arial"/>
-              </a:rPr>
-              <a:t>Reference links</a:t>
-            </a:r>
-          </a:p>
-        </p:txBody>
-      </p:sp>
-      <p:sp>
-        <p:nvSpPr>
           <p:cNvPr id="103" name="Research card 103"/>
           <p:cNvSpPr/>
           <p:nvPr/>
         </p:nvSpPr>
         <p:spPr>
           <a:xfrm>
-            <a:off x="457200" y="1720000"/>
-            <a:ext cx="5500000" cy="4430000"/>
+            <a:off x="457200" y="1423555"/>
+            <a:ext cx="5361709" cy="2161310"/>
           </a:xfrm>
           <a:prstGeom prst="roundRect">
             <a:avLst>
@@ -11715,7 +11553,7 @@
               <a:buChar char="•"/>
             </a:pPr>
             <a:r>
-              <a:rPr lang="en-US" sz="1600" dirty="0">
+              <a:rPr lang="en-US" sz="1200" dirty="0">
                 <a:solidFill>
                   <a:srgbClr val="404040"/>
                 </a:solidFill>
@@ -11737,7 +11575,7 @@
               <a:buChar char="•"/>
             </a:pPr>
             <a:r>
-              <a:rPr lang="en-US" sz="1600" b="1" dirty="0">
+              <a:rPr lang="en-US" sz="1200" b="1" dirty="0">
                 <a:solidFill>
                   <a:srgbClr val="404040"/>
                 </a:solidFill>
@@ -11759,7 +11597,7 @@
               <a:buChar char="•"/>
             </a:pPr>
             <a:r>
-              <a:rPr lang="en-US" sz="1600" dirty="0">
+              <a:rPr lang="en-US" sz="1200" dirty="0">
                 <a:solidFill>
                   <a:srgbClr val="404040"/>
                 </a:solidFill>
@@ -11781,7 +11619,7 @@
               <a:buChar char="•"/>
             </a:pPr>
             <a:r>
-              <a:rPr lang="en-US" sz="1600" dirty="0">
+              <a:rPr lang="en-US" sz="1200" dirty="0">
                 <a:solidFill>
                   <a:srgbClr val="404040"/>
                 </a:solidFill>
@@ -11801,8 +11639,8 @@
         </p:nvSpPr>
         <p:spPr>
           <a:xfrm>
-            <a:off x="6257200" y="1720000"/>
-            <a:ext cx="5477600" cy="4430000"/>
+            <a:off x="479600" y="3745063"/>
+            <a:ext cx="5361709" cy="2395963"/>
           </a:xfrm>
           <a:prstGeom prst="roundRect">
             <a:avLst>
@@ -11834,15 +11672,81 @@
               <a:buNone/>
             </a:pPr>
             <a:r>
-              <a:rPr lang="en-US" sz="1500" b="1" dirty="0">
+              <a:rPr lang="en-US" sz="1200" b="1" dirty="0">
                 <a:solidFill>
                   <a:srgbClr val="1F3864"/>
                 </a:solidFill>
                 <a:latin typeface="Arial"/>
                 <a:cs typeface="Arial"/>
               </a:rPr>
-              <a:t>PlateOCR: detect and read pipeline</a:t>
-            </a:r>
+              <a:t>PlateOCR: detect and read pipeline - </a:t>
+            </a:r>
+            <a:r>
+              <a:rPr lang="en-US" sz="1200" dirty="0">
+                <a:solidFill>
+                  <a:srgbClr val="1F3864"/>
+                </a:solidFill>
+                <a:latin typeface="Arial"/>
+                <a:cs typeface="Arial"/>
+                <a:hlinkClick r:id="rId4"/>
+              </a:rPr>
+              <a:t>PlateOCR</a:t>
+            </a:r>
+            <a:br>
+              <a:rPr lang="en-US" sz="1200" dirty="0">
+                <a:solidFill>
+                  <a:srgbClr val="1F3864"/>
+                </a:solidFill>
+                <a:latin typeface="Arial"/>
+                <a:cs typeface="Arial"/>
+              </a:rPr>
+            </a:br>
+            <a:br>
+              <a:rPr lang="en-US" sz="1200" dirty="0">
+                <a:solidFill>
+                  <a:srgbClr val="1F3864"/>
+                </a:solidFill>
+                <a:latin typeface="Arial"/>
+                <a:cs typeface="Arial"/>
+              </a:rPr>
+            </a:br>
+            <a:r>
+              <a:rPr lang="en-US" sz="1200" b="1" dirty="0">
+                <a:solidFill>
+                  <a:srgbClr val="1F3864"/>
+                </a:solidFill>
+                <a:latin typeface="Arial"/>
+                <a:cs typeface="Arial"/>
+              </a:rPr>
+              <a:t>PlateOCR research and benchmark notes  - </a:t>
+            </a:r>
+            <a:r>
+              <a:rPr lang="en-US" sz="1200" dirty="0">
+                <a:solidFill>
+                  <a:srgbClr val="1F3864"/>
+                </a:solidFill>
+                <a:latin typeface="Arial"/>
+                <a:cs typeface="Arial"/>
+                <a:hlinkClick r:id="rId5"/>
+              </a:rPr>
+              <a:t>RESEARCH</a:t>
+            </a:r>
+            <a:br>
+              <a:rPr lang="en-US" sz="1200" dirty="0">
+                <a:solidFill>
+                  <a:srgbClr val="1F3864"/>
+                </a:solidFill>
+                <a:latin typeface="Arial"/>
+                <a:cs typeface="Arial"/>
+              </a:rPr>
+            </a:br>
+            <a:endParaRPr lang="en-US" sz="1200" dirty="0">
+              <a:solidFill>
+                <a:srgbClr val="1F3864"/>
+              </a:solidFill>
+              <a:latin typeface="Arial"/>
+              <a:cs typeface="Arial"/>
+            </a:endParaRPr>
           </a:p>
           <a:p>
             <a:pPr marL="0" indent="0" algn="l">
@@ -11850,18 +11754,39 @@
                 <a:spcPts val="0"/>
               </a:spcBef>
               <a:spcAft>
-                <a:spcPts val="1000"/>
+                <a:spcPts val="0"/>
               </a:spcAft>
               <a:buNone/>
             </a:pPr>
             <a:r>
-              <a:rPr lang="en-US" sz="1400" u="sng" dirty="0">
+              <a:rPr lang="en-US" sz="1200" b="1" dirty="0">
+                <a:solidFill>
+                  <a:srgbClr val="1F3864"/>
+                </a:solidFill>
                 <a:latin typeface="Arial"/>
                 <a:cs typeface="Arial"/>
-                <a:hlinkClick r:id="rId4"/>
-              </a:rPr>
-              <a:t>github.com/Ajitesh-07/PlateOCR</a:t>
-            </a:r>
+              </a:rPr>
+              <a:t>FastALPR (detector + OCR framework) - </a:t>
+            </a:r>
+            <a:r>
+              <a:rPr lang="en-US" sz="1200" u="sng" dirty="0">
+                <a:latin typeface="Arial"/>
+                <a:cs typeface="Arial"/>
+                <a:hlinkClick r:id="rId6"/>
+              </a:rPr>
+              <a:t>fast-alpr</a:t>
+            </a:r>
+            <a:br>
+              <a:rPr lang="en-US" sz="1200" u="sng" dirty="0">
+                <a:latin typeface="Arial"/>
+                <a:cs typeface="Arial"/>
+              </a:rPr>
+            </a:br>
+            <a:endParaRPr lang="en-US" sz="1200" u="sng" dirty="0">
+              <a:latin typeface="Arial"/>
+              <a:cs typeface="Arial"/>
+              <a:hlinkClick r:id="rId7"/>
+            </a:endParaRPr>
           </a:p>
           <a:p>
             <a:pPr marL="0" indent="0" algn="l">
@@ -11874,15 +11799,54 @@
               <a:buNone/>
             </a:pPr>
             <a:r>
-              <a:rPr lang="en-US" sz="1500" b="1" dirty="0">
+              <a:rPr lang="en-US" sz="1200" b="1" dirty="0">
                 <a:solidFill>
                   <a:srgbClr val="1F3864"/>
                 </a:solidFill>
                 <a:latin typeface="Arial"/>
                 <a:cs typeface="Arial"/>
               </a:rPr>
-              <a:t>PlateOCR research and benchmark notes</a:t>
-            </a:r>
+              <a:t>Fast-plate-</a:t>
+            </a:r>
+            <a:r>
+              <a:rPr lang="en-US" sz="1200" b="1" dirty="0" err="1">
+                <a:solidFill>
+                  <a:srgbClr val="1F3864"/>
+                </a:solidFill>
+                <a:latin typeface="Arial"/>
+                <a:cs typeface="Arial"/>
+              </a:rPr>
+              <a:t>ocr</a:t>
+            </a:r>
+            <a:r>
+              <a:rPr lang="en-US" sz="1200" b="1" dirty="0">
+                <a:solidFill>
+                  <a:srgbClr val="1F3864"/>
+                </a:solidFill>
+                <a:latin typeface="Arial"/>
+                <a:cs typeface="Arial"/>
+              </a:rPr>
+              <a:t> (fine-tuning CCT models) - </a:t>
+            </a:r>
+            <a:r>
+              <a:rPr lang="en-US" sz="1200" u="sng" dirty="0">
+                <a:latin typeface="Arial"/>
+                <a:cs typeface="Arial"/>
+                <a:hlinkClick r:id="rId8"/>
+              </a:rPr>
+              <a:t>fast-plate-ocr</a:t>
+            </a:r>
+            <a:br>
+              <a:rPr lang="en-US" sz="1200" u="sng" dirty="0">
+                <a:latin typeface="Arial"/>
+                <a:cs typeface="Arial"/>
+              </a:rPr>
+            </a:br>
+            <a:endParaRPr lang="en-US" sz="1200" u="sng" dirty="0">
+              <a:latin typeface="Arial"/>
+              <a:cs typeface="Arial"/>
+              <a:hlinkClick r:id="rId9"/>
+            </a:endParaRPr>
           </a:p>
           <a:p>
             <a:pPr marL="0" indent="0" algn="l">
@@ -11890,138 +11854,33 @@
                 <a:spcPts val="0"/>
               </a:spcBef>
               <a:spcAft>
-                <a:spcPts val="1000"/>
+                <a:spcPts val="0"/>
               </a:spcAft>
               <a:buNone/>
             </a:pPr>
             <a:r>
-              <a:rPr lang="en-US" sz="1400" u="sng" dirty="0">
+              <a:rPr lang="en-US" sz="1200" b="1" dirty="0">
+                <a:solidFill>
+                  <a:srgbClr val="1F3864"/>
+                </a:solidFill>
                 <a:latin typeface="Arial"/>
                 <a:cs typeface="Arial"/>
-                <a:hlinkClick r:id="rId5"/>
-              </a:rPr>
-              <a:t>PlateOCR / RESEARCH.md</a:t>
-            </a:r>
-          </a:p>
-          <a:p>
-            <a:pPr marL="0" indent="0" algn="l">
-              <a:spcBef>
-                <a:spcPts val="0"/>
-              </a:spcBef>
-              <a:spcAft>
-                <a:spcPts val="0"/>
-              </a:spcAft>
-              <a:buNone/>
-            </a:pPr>
-            <a:r>
-              <a:rPr lang="en-US" sz="1500" b="1" dirty="0">
-                <a:solidFill>
-                  <a:srgbClr val="1F3864"/>
-                </a:solidFill>
+              </a:rPr>
+              <a:t>OpenALPR end-to-end benchmark - </a:t>
+            </a:r>
+            <a:r>
+              <a:rPr lang="en-US" sz="1200" u="sng" dirty="0">
                 <a:latin typeface="Arial"/>
                 <a:cs typeface="Arial"/>
-              </a:rPr>
-              <a:t>FastALPR (detector + OCR framework)</a:t>
-            </a:r>
-          </a:p>
-          <a:p>
-            <a:pPr marL="0" indent="0" algn="l">
-              <a:spcBef>
-                <a:spcPts val="0"/>
-              </a:spcBef>
-              <a:spcAft>
-                <a:spcPts val="1000"/>
-              </a:spcAft>
-              <a:buNone/>
-            </a:pPr>
-            <a:r>
-              <a:rPr lang="en-US" sz="1400" u="sng" dirty="0">
-                <a:latin typeface="Arial"/>
-                <a:cs typeface="Arial"/>
-                <a:hlinkClick r:id="rId6"/>
-              </a:rPr>
-              <a:t>github.com/ankandrew/fast-alpr</a:t>
-            </a:r>
-          </a:p>
-          <a:p>
-            <a:pPr marL="0" indent="0" algn="l">
-              <a:spcBef>
-                <a:spcPts val="0"/>
-              </a:spcBef>
-              <a:spcAft>
-                <a:spcPts val="0"/>
-              </a:spcAft>
-              <a:buNone/>
-            </a:pPr>
-            <a:r>
-              <a:rPr lang="en-US" sz="1500" b="1" dirty="0">
-                <a:solidFill>
-                  <a:srgbClr val="1F3864"/>
-                </a:solidFill>
-                <a:latin typeface="Arial"/>
-                <a:cs typeface="Arial"/>
-              </a:rPr>
-              <a:t>fast-plate-ocr (fine-tuning CCT models)</a:t>
-            </a:r>
-          </a:p>
-          <a:p>
-            <a:pPr marL="0" indent="0" algn="l">
-              <a:spcBef>
-                <a:spcPts val="0"/>
-              </a:spcBef>
-              <a:spcAft>
-                <a:spcPts val="1000"/>
-              </a:spcAft>
-              <a:buNone/>
-            </a:pPr>
-            <a:r>
-              <a:rPr lang="en-US" sz="1400" u="sng" dirty="0">
-                <a:latin typeface="Arial"/>
-                <a:cs typeface="Arial"/>
-                <a:hlinkClick r:id="rId7"/>
-              </a:rPr>
-              <a:t>github.com/ankandrew/fast-plate-ocr</a:t>
-            </a:r>
-          </a:p>
-          <a:p>
-            <a:pPr marL="0" indent="0" algn="l">
-              <a:spcBef>
-                <a:spcPts val="0"/>
-              </a:spcBef>
-              <a:spcAft>
-                <a:spcPts val="0"/>
-              </a:spcAft>
-              <a:buNone/>
-            </a:pPr>
-            <a:r>
-              <a:rPr lang="en-US" sz="1500" b="1" dirty="0">
-                <a:solidFill>
-                  <a:srgbClr val="1F3864"/>
-                </a:solidFill>
-                <a:latin typeface="Arial"/>
-                <a:cs typeface="Arial"/>
-              </a:rPr>
-              <a:t>OpenALPR end-to-end benchmark</a:t>
-            </a:r>
-          </a:p>
-          <a:p>
-            <a:pPr marL="0" indent="0" algn="l">
-              <a:spcBef>
-                <a:spcPts val="0"/>
-              </a:spcBef>
-              <a:spcAft>
-                <a:spcPts val="1000"/>
-              </a:spcAft>
-              <a:buNone/>
-            </a:pPr>
-            <a:r>
-              <a:rPr lang="en-US" sz="1400" u="sng" dirty="0">
-                <a:latin typeface="Arial"/>
-                <a:cs typeface="Arial"/>
-                <a:hlinkClick r:id="rId8"/>
-              </a:rPr>
-              <a:t>github.com/openalpr/benchmarks</a:t>
-            </a:r>
+                <a:hlinkClick r:id="rId10"/>
+              </a:rPr>
+              <a:t>benchmarks</a:t>
+            </a:r>
+            <a:endParaRPr lang="en-US" sz="1200" u="sng" dirty="0">
+              <a:latin typeface="Arial"/>
+              <a:cs typeface="Arial"/>
+              <a:hlinkClick r:id="rId11"/>
+            </a:endParaRPr>
           </a:p>
         </p:txBody>
       </p:sp>

--- a/CrossSight_SIH2026_Idea_PPT.pptx
+++ b/CrossSight_SIH2026_Idea_PPT.pptx
@@ -11522,7 +11522,7 @@
         <p:spPr>
           <a:xfrm>
             <a:off x="457200" y="1423555"/>
-            <a:ext cx="5361709" cy="2161310"/>
+            <a:ext cx="4966855" cy="2201300"/>
           </a:xfrm>
           <a:prstGeom prst="roundRect">
             <a:avLst>
@@ -11639,8 +11639,8 @@
         </p:nvSpPr>
         <p:spPr>
           <a:xfrm>
-            <a:off x="479600" y="3745063"/>
-            <a:ext cx="5361709" cy="2395963"/>
+            <a:off x="479601" y="3745064"/>
+            <a:ext cx="4966856" cy="2364792"/>
           </a:xfrm>
           <a:prstGeom prst="roundRect">
             <a:avLst>
@@ -11935,6 +11935,37 @@
           </a:p>
         </p:txBody>
       </p:sp>
+      <p:pic>
+        <p:nvPicPr>
+          <p:cNvPr id="8" name="Picture 7">
+            <a:extLst>
+              <a:ext uri="{FF2B5EF4-FFF2-40B4-BE49-F238E27FC236}">
+                <a16:creationId xmlns:a16="http://schemas.microsoft.com/office/drawing/2014/main" id="{8D07DFCA-E47C-0550-AE73-B40568D8F88C}"/>
+              </a:ext>
+            </a:extLst>
+          </p:cNvPr>
+          <p:cNvPicPr>
+            <a:picLocks noChangeAspect="1"/>
+          </p:cNvPicPr>
+          <p:nvPr/>
+        </p:nvPicPr>
+        <p:blipFill>
+          <a:blip r:embed="rId12"/>
+          <a:srcRect t="3245" r="18242"/>
+          <a:stretch>
+            <a:fillRect/>
+          </a:stretch>
+        </p:blipFill>
+        <p:spPr>
+          <a:xfrm>
+            <a:off x="5600700" y="1696281"/>
+            <a:ext cx="6429236" cy="3985002"/>
+          </a:xfrm>
+          <a:prstGeom prst="rect">
+            <a:avLst/>
+          </a:prstGeom>
+        </p:spPr>
+      </p:pic>
     </p:spTree>
     <p:extLst>
       <p:ext uri="{BB962C8B-B14F-4D97-AF65-F5344CB8AC3E}">
